--- a/Project/Segmentation & Recommendation/Wine Recommendation - K-Nearest Neighbors/result/slides/Executive_Wine_Recommendation_Report_20260830.pptx
+++ b/Project/Segmentation & Recommendation/Wine Recommendation - K-Nearest Neighbors/result/slides/Executive_Wine_Recommendation_Report_20260830.pptx
@@ -4800,7 +4800,7 @@
         <p:spPr>
           <a:xfrm>
             <a:off x="5532120" y="1737360"/>
-            <a:ext cx="1051560" cy="457200"/>
+            <a:ext cx="757123" cy="457200"/>
           </a:xfrm>
           <a:prstGeom prst="rect">
             <a:avLst/>
@@ -4843,8 +4843,8 @@
         </p:nvSpPr>
         <p:spPr>
           <a:xfrm>
-            <a:off x="5641848" y="1737360"/>
-            <a:ext cx="868680" cy="457200"/>
+            <a:off x="5715000" y="1737360"/>
+            <a:ext cx="574243" cy="457200"/>
           </a:xfrm>
           <a:prstGeom prst="rect">
             <a:avLst/>
@@ -4877,8 +4877,8 @@
         </p:nvSpPr>
         <p:spPr>
           <a:xfrm>
-            <a:off x="6583680" y="1737360"/>
-            <a:ext cx="1051560" cy="457200"/>
+            <a:off x="6289243" y="1737360"/>
+            <a:ext cx="1198778" cy="457200"/>
           </a:xfrm>
           <a:prstGeom prst="rect">
             <a:avLst/>
@@ -4921,8 +4921,8 @@
         </p:nvSpPr>
         <p:spPr>
           <a:xfrm>
-            <a:off x="6693408" y="1737360"/>
-            <a:ext cx="868680" cy="457200"/>
+            <a:off x="6289243" y="1737360"/>
+            <a:ext cx="1198778" cy="457200"/>
           </a:xfrm>
           <a:prstGeom prst="rect">
             <a:avLst/>
@@ -4935,7 +4935,7 @@
           </a:bodyPr>
           <a:lstStyle/>
           <a:p>
-            <a:pPr algn="l"/>
+            <a:pPr algn="ctr"/>
             <a:r>
               <a:rPr sz="1300" b="1" i="0">
                 <a:solidFill>
@@ -4955,8 +4955,8 @@
         </p:nvSpPr>
         <p:spPr>
           <a:xfrm>
-            <a:off x="7635240" y="1737360"/>
-            <a:ext cx="1051560" cy="457200"/>
+            <a:off x="7488021" y="1737360"/>
+            <a:ext cx="1198778" cy="457200"/>
           </a:xfrm>
           <a:prstGeom prst="rect">
             <a:avLst/>
@@ -4999,8 +4999,8 @@
         </p:nvSpPr>
         <p:spPr>
           <a:xfrm>
-            <a:off x="7744967" y="1737360"/>
-            <a:ext cx="868680" cy="457200"/>
+            <a:off x="7488021" y="1737360"/>
+            <a:ext cx="1198778" cy="457200"/>
           </a:xfrm>
           <a:prstGeom prst="rect">
             <a:avLst/>
@@ -5013,7 +5013,7 @@
           </a:bodyPr>
           <a:lstStyle/>
           <a:p>
-            <a:pPr algn="l"/>
+            <a:pPr algn="ctr"/>
             <a:r>
               <a:rPr sz="1300" b="1" i="0">
                 <a:solidFill>
@@ -5034,7 +5034,7 @@
         <p:spPr>
           <a:xfrm>
             <a:off x="5532120" y="2194560"/>
-            <a:ext cx="1051560" cy="384048"/>
+            <a:ext cx="757123" cy="411480"/>
           </a:xfrm>
           <a:prstGeom prst="rect">
             <a:avLst/>
@@ -5077,8 +5077,8 @@
         </p:nvSpPr>
         <p:spPr>
           <a:xfrm>
-            <a:off x="5641848" y="2194560"/>
-            <a:ext cx="868680" cy="384048"/>
+            <a:off x="5715000" y="2194560"/>
+            <a:ext cx="574243" cy="411480"/>
           </a:xfrm>
           <a:prstGeom prst="rect">
             <a:avLst/>
@@ -5093,9 +5093,9 @@
           <a:p>
             <a:pPr algn="l"/>
             <a:r>
-              <a:rPr sz="1300" b="0" i="0">
-                <a:solidFill>
-                  <a:srgbClr val="2C3945"/>
+              <a:rPr sz="1400" b="1" i="0">
+                <a:solidFill>
+                  <a:srgbClr val="14324B"/>
                 </a:solidFill>
               </a:rPr>
               <a:t>Wine #11</a:t>
@@ -5111,8 +5111,8 @@
         </p:nvSpPr>
         <p:spPr>
           <a:xfrm>
-            <a:off x="6583680" y="2194560"/>
-            <a:ext cx="1051560" cy="384048"/>
+            <a:off x="6289243" y="2194560"/>
+            <a:ext cx="1198778" cy="411480"/>
           </a:xfrm>
           <a:prstGeom prst="rect">
             <a:avLst/>
@@ -5155,8 +5155,8 @@
         </p:nvSpPr>
         <p:spPr>
           <a:xfrm>
-            <a:off x="6693408" y="2194560"/>
-            <a:ext cx="868680" cy="384048"/>
+            <a:off x="6289243" y="2194560"/>
+            <a:ext cx="1198778" cy="411480"/>
           </a:xfrm>
           <a:prstGeom prst="rect">
             <a:avLst/>
@@ -5169,9 +5169,9 @@
           </a:bodyPr>
           <a:lstStyle/>
           <a:p>
-            <a:pPr algn="l"/>
-            <a:r>
-              <a:rPr sz="1300" b="0" i="0">
+            <a:pPr algn="ctr"/>
+            <a:r>
+              <a:rPr sz="1400" b="0" i="0">
                 <a:solidFill>
                   <a:srgbClr val="2C3945"/>
                 </a:solidFill>
@@ -5189,8 +5189,8 @@
         </p:nvSpPr>
         <p:spPr>
           <a:xfrm>
-            <a:off x="7635240" y="2194560"/>
-            <a:ext cx="1051560" cy="384048"/>
+            <a:off x="7488021" y="2194560"/>
+            <a:ext cx="1198778" cy="411480"/>
           </a:xfrm>
           <a:prstGeom prst="rect">
             <a:avLst/>
@@ -5233,8 +5233,8 @@
         </p:nvSpPr>
         <p:spPr>
           <a:xfrm>
-            <a:off x="7744967" y="2194560"/>
-            <a:ext cx="868680" cy="384048"/>
+            <a:off x="7488021" y="2194560"/>
+            <a:ext cx="1198778" cy="411480"/>
           </a:xfrm>
           <a:prstGeom prst="rect">
             <a:avLst/>
@@ -5247,9 +5247,9 @@
           </a:bodyPr>
           <a:lstStyle/>
           <a:p>
-            <a:pPr algn="l"/>
-            <a:r>
-              <a:rPr sz="1300" b="0" i="0">
+            <a:pPr algn="ctr"/>
+            <a:r>
+              <a:rPr sz="1400" b="0" i="0">
                 <a:solidFill>
                   <a:srgbClr val="2C3945"/>
                 </a:solidFill>
@@ -5267,8 +5267,8 @@
         </p:nvSpPr>
         <p:spPr>
           <a:xfrm>
-            <a:off x="5532120" y="2578608"/>
-            <a:ext cx="1051560" cy="384048"/>
+            <a:off x="5532120" y="2606040"/>
+            <a:ext cx="757123" cy="411480"/>
           </a:xfrm>
           <a:prstGeom prst="rect">
             <a:avLst/>
@@ -5311,8 +5311,8 @@
         </p:nvSpPr>
         <p:spPr>
           <a:xfrm>
-            <a:off x="5641848" y="2578608"/>
-            <a:ext cx="868680" cy="384048"/>
+            <a:off x="5715000" y="2606040"/>
+            <a:ext cx="574243" cy="411480"/>
           </a:xfrm>
           <a:prstGeom prst="rect">
             <a:avLst/>
@@ -5327,9 +5327,9 @@
           <a:p>
             <a:pPr algn="l"/>
             <a:r>
-              <a:rPr sz="1300" b="0" i="0">
-                <a:solidFill>
-                  <a:srgbClr val="2C3945"/>
+              <a:rPr sz="1400" b="1" i="0">
+                <a:solidFill>
+                  <a:srgbClr val="14324B"/>
                 </a:solidFill>
               </a:rPr>
               <a:t>Wine #51</a:t>
@@ -5345,8 +5345,8 @@
         </p:nvSpPr>
         <p:spPr>
           <a:xfrm>
-            <a:off x="6583680" y="2578608"/>
-            <a:ext cx="1051560" cy="384048"/>
+            <a:off x="6289243" y="2606040"/>
+            <a:ext cx="1198778" cy="411480"/>
           </a:xfrm>
           <a:prstGeom prst="rect">
             <a:avLst/>
@@ -5389,8 +5389,8 @@
         </p:nvSpPr>
         <p:spPr>
           <a:xfrm>
-            <a:off x="6693408" y="2578608"/>
-            <a:ext cx="868680" cy="384048"/>
+            <a:off x="6289243" y="2606040"/>
+            <a:ext cx="1198778" cy="411480"/>
           </a:xfrm>
           <a:prstGeom prst="rect">
             <a:avLst/>
@@ -5403,9 +5403,9 @@
           </a:bodyPr>
           <a:lstStyle/>
           <a:p>
-            <a:pPr algn="l"/>
-            <a:r>
-              <a:rPr sz="1300" b="0" i="0">
+            <a:pPr algn="ctr"/>
+            <a:r>
+              <a:rPr sz="1400" b="0" i="0">
                 <a:solidFill>
                   <a:srgbClr val="2C3945"/>
                 </a:solidFill>
@@ -5423,8 +5423,8 @@
         </p:nvSpPr>
         <p:spPr>
           <a:xfrm>
-            <a:off x="7635240" y="2578608"/>
-            <a:ext cx="1051560" cy="384048"/>
+            <a:off x="7488021" y="2606040"/>
+            <a:ext cx="1198778" cy="411480"/>
           </a:xfrm>
           <a:prstGeom prst="rect">
             <a:avLst/>
@@ -5467,8 +5467,8 @@
         </p:nvSpPr>
         <p:spPr>
           <a:xfrm>
-            <a:off x="7744967" y="2578608"/>
-            <a:ext cx="868680" cy="384048"/>
+            <a:off x="7488021" y="2606040"/>
+            <a:ext cx="1198778" cy="411480"/>
           </a:xfrm>
           <a:prstGeom prst="rect">
             <a:avLst/>
@@ -5481,9 +5481,9 @@
           </a:bodyPr>
           <a:lstStyle/>
           <a:p>
-            <a:pPr algn="l"/>
-            <a:r>
-              <a:rPr sz="1300" b="0" i="0">
+            <a:pPr algn="ctr"/>
+            <a:r>
+              <a:rPr sz="1400" b="0" i="0">
                 <a:solidFill>
                   <a:srgbClr val="2C3945"/>
                 </a:solidFill>
@@ -5501,8 +5501,8 @@
         </p:nvSpPr>
         <p:spPr>
           <a:xfrm>
-            <a:off x="5532120" y="2962656"/>
-            <a:ext cx="1051560" cy="384048"/>
+            <a:off x="5532120" y="3017520"/>
+            <a:ext cx="757123" cy="411480"/>
           </a:xfrm>
           <a:prstGeom prst="rect">
             <a:avLst/>
@@ -5545,8 +5545,8 @@
         </p:nvSpPr>
         <p:spPr>
           <a:xfrm>
-            <a:off x="5641848" y="2962656"/>
-            <a:ext cx="868680" cy="384048"/>
+            <a:off x="5715000" y="3017520"/>
+            <a:ext cx="574243" cy="411480"/>
           </a:xfrm>
           <a:prstGeom prst="rect">
             <a:avLst/>
@@ -5561,9 +5561,9 @@
           <a:p>
             <a:pPr algn="l"/>
             <a:r>
-              <a:rPr sz="1300" b="0" i="0">
-                <a:solidFill>
-                  <a:srgbClr val="2C3945"/>
+              <a:rPr sz="1400" b="1" i="0">
+                <a:solidFill>
+                  <a:srgbClr val="14324B"/>
                 </a:solidFill>
               </a:rPr>
               <a:t>Wine #6</a:t>
@@ -5579,8 +5579,8 @@
         </p:nvSpPr>
         <p:spPr>
           <a:xfrm>
-            <a:off x="6583680" y="2962656"/>
-            <a:ext cx="1051560" cy="384048"/>
+            <a:off x="6289243" y="3017520"/>
+            <a:ext cx="1198778" cy="411480"/>
           </a:xfrm>
           <a:prstGeom prst="rect">
             <a:avLst/>
@@ -5623,8 +5623,8 @@
         </p:nvSpPr>
         <p:spPr>
           <a:xfrm>
-            <a:off x="6693408" y="2962656"/>
-            <a:ext cx="868680" cy="384048"/>
+            <a:off x="6289243" y="3017520"/>
+            <a:ext cx="1198778" cy="411480"/>
           </a:xfrm>
           <a:prstGeom prst="rect">
             <a:avLst/>
@@ -5637,9 +5637,9 @@
           </a:bodyPr>
           <a:lstStyle/>
           <a:p>
-            <a:pPr algn="l"/>
-            <a:r>
-              <a:rPr sz="1300" b="0" i="0">
+            <a:pPr algn="ctr"/>
+            <a:r>
+              <a:rPr sz="1400" b="0" i="0">
                 <a:solidFill>
                   <a:srgbClr val="2C3945"/>
                 </a:solidFill>
@@ -5657,8 +5657,8 @@
         </p:nvSpPr>
         <p:spPr>
           <a:xfrm>
-            <a:off x="7635240" y="2962656"/>
-            <a:ext cx="1051560" cy="384048"/>
+            <a:off x="7488021" y="3017520"/>
+            <a:ext cx="1198778" cy="411480"/>
           </a:xfrm>
           <a:prstGeom prst="rect">
             <a:avLst/>
@@ -5701,8 +5701,8 @@
         </p:nvSpPr>
         <p:spPr>
           <a:xfrm>
-            <a:off x="7744967" y="2962656"/>
-            <a:ext cx="868680" cy="384048"/>
+            <a:off x="7488021" y="3017520"/>
+            <a:ext cx="1198778" cy="411480"/>
           </a:xfrm>
           <a:prstGeom prst="rect">
             <a:avLst/>
@@ -5715,9 +5715,9 @@
           </a:bodyPr>
           <a:lstStyle/>
           <a:p>
-            <a:pPr algn="l"/>
-            <a:r>
-              <a:rPr sz="1300" b="0" i="0">
+            <a:pPr algn="ctr"/>
+            <a:r>
+              <a:rPr sz="1400" b="0" i="0">
                 <a:solidFill>
                   <a:srgbClr val="2C3945"/>
                 </a:solidFill>
@@ -5735,8 +5735,8 @@
         </p:nvSpPr>
         <p:spPr>
           <a:xfrm>
-            <a:off x="5532120" y="3346703"/>
-            <a:ext cx="1051560" cy="384048"/>
+            <a:off x="5532120" y="3429000"/>
+            <a:ext cx="757123" cy="411480"/>
           </a:xfrm>
           <a:prstGeom prst="rect">
             <a:avLst/>
@@ -5779,8 +5779,8 @@
         </p:nvSpPr>
         <p:spPr>
           <a:xfrm>
-            <a:off x="5641848" y="3346703"/>
-            <a:ext cx="868680" cy="384048"/>
+            <a:off x="5715000" y="3429000"/>
+            <a:ext cx="574243" cy="411480"/>
           </a:xfrm>
           <a:prstGeom prst="rect">
             <a:avLst/>
@@ -5795,9 +5795,9 @@
           <a:p>
             <a:pPr algn="l"/>
             <a:r>
-              <a:rPr sz="1300" b="0" i="0">
-                <a:solidFill>
-                  <a:srgbClr val="2C3945"/>
+              <a:rPr sz="1400" b="1" i="0">
+                <a:solidFill>
+                  <a:srgbClr val="14324B"/>
                 </a:solidFill>
               </a:rPr>
               <a:t>Wine #14</a:t>
@@ -5813,8 +5813,8 @@
         </p:nvSpPr>
         <p:spPr>
           <a:xfrm>
-            <a:off x="6583680" y="3346703"/>
-            <a:ext cx="1051560" cy="384048"/>
+            <a:off x="6289243" y="3429000"/>
+            <a:ext cx="1198778" cy="411480"/>
           </a:xfrm>
           <a:prstGeom prst="rect">
             <a:avLst/>
@@ -5857,8 +5857,8 @@
         </p:nvSpPr>
         <p:spPr>
           <a:xfrm>
-            <a:off x="6693408" y="3346703"/>
-            <a:ext cx="868680" cy="384048"/>
+            <a:off x="6289243" y="3429000"/>
+            <a:ext cx="1198778" cy="411480"/>
           </a:xfrm>
           <a:prstGeom prst="rect">
             <a:avLst/>
@@ -5871,9 +5871,9 @@
           </a:bodyPr>
           <a:lstStyle/>
           <a:p>
-            <a:pPr algn="l"/>
-            <a:r>
-              <a:rPr sz="1300" b="0" i="0">
+            <a:pPr algn="ctr"/>
+            <a:r>
+              <a:rPr sz="1400" b="0" i="0">
                 <a:solidFill>
                   <a:srgbClr val="2C3945"/>
                 </a:solidFill>
@@ -5891,8 +5891,8 @@
         </p:nvSpPr>
         <p:spPr>
           <a:xfrm>
-            <a:off x="7635240" y="3346703"/>
-            <a:ext cx="1051560" cy="384048"/>
+            <a:off x="7488021" y="3429000"/>
+            <a:ext cx="1198778" cy="411480"/>
           </a:xfrm>
           <a:prstGeom prst="rect">
             <a:avLst/>
@@ -5935,8 +5935,8 @@
         </p:nvSpPr>
         <p:spPr>
           <a:xfrm>
-            <a:off x="7744967" y="3346703"/>
-            <a:ext cx="868680" cy="384048"/>
+            <a:off x="7488021" y="3429000"/>
+            <a:ext cx="1198778" cy="411480"/>
           </a:xfrm>
           <a:prstGeom prst="rect">
             <a:avLst/>
@@ -5949,9 +5949,9 @@
           </a:bodyPr>
           <a:lstStyle/>
           <a:p>
-            <a:pPr algn="l"/>
-            <a:r>
-              <a:rPr sz="1300" b="0" i="0">
+            <a:pPr algn="ctr"/>
+            <a:r>
+              <a:rPr sz="1400" b="0" i="0">
                 <a:solidFill>
                   <a:srgbClr val="2C3945"/>
                 </a:solidFill>
@@ -5969,8 +5969,8 @@
         </p:nvSpPr>
         <p:spPr>
           <a:xfrm>
-            <a:off x="5532120" y="3730752"/>
-            <a:ext cx="1051560" cy="384048"/>
+            <a:off x="5532120" y="3840480"/>
+            <a:ext cx="757123" cy="411480"/>
           </a:xfrm>
           <a:prstGeom prst="rect">
             <a:avLst/>
@@ -6013,8 +6013,8 @@
         </p:nvSpPr>
         <p:spPr>
           <a:xfrm>
-            <a:off x="5641848" y="3730752"/>
-            <a:ext cx="868680" cy="384048"/>
+            <a:off x="5715000" y="3840480"/>
+            <a:ext cx="574243" cy="411480"/>
           </a:xfrm>
           <a:prstGeom prst="rect">
             <a:avLst/>
@@ -6029,9 +6029,9 @@
           <a:p>
             <a:pPr algn="l"/>
             <a:r>
-              <a:rPr sz="1300" b="0" i="0">
-                <a:solidFill>
-                  <a:srgbClr val="2C3945"/>
+              <a:rPr sz="1400" b="1" i="0">
+                <a:solidFill>
+                  <a:srgbClr val="14324B"/>
                 </a:solidFill>
               </a:rPr>
               <a:t>Wine #10</a:t>
@@ -6047,8 +6047,8 @@
         </p:nvSpPr>
         <p:spPr>
           <a:xfrm>
-            <a:off x="6583680" y="3730752"/>
-            <a:ext cx="1051560" cy="384048"/>
+            <a:off x="6289243" y="3840480"/>
+            <a:ext cx="1198778" cy="411480"/>
           </a:xfrm>
           <a:prstGeom prst="rect">
             <a:avLst/>
@@ -6091,8 +6091,8 @@
         </p:nvSpPr>
         <p:spPr>
           <a:xfrm>
-            <a:off x="6693408" y="3730752"/>
-            <a:ext cx="868680" cy="384048"/>
+            <a:off x="6289243" y="3840480"/>
+            <a:ext cx="1198778" cy="411480"/>
           </a:xfrm>
           <a:prstGeom prst="rect">
             <a:avLst/>
@@ -6105,9 +6105,9 @@
           </a:bodyPr>
           <a:lstStyle/>
           <a:p>
-            <a:pPr algn="l"/>
-            <a:r>
-              <a:rPr sz="1300" b="0" i="0">
+            <a:pPr algn="ctr"/>
+            <a:r>
+              <a:rPr sz="1400" b="0" i="0">
                 <a:solidFill>
                   <a:srgbClr val="2C3945"/>
                 </a:solidFill>
@@ -6125,8 +6125,8 @@
         </p:nvSpPr>
         <p:spPr>
           <a:xfrm>
-            <a:off x="7635240" y="3730752"/>
-            <a:ext cx="1051560" cy="384048"/>
+            <a:off x="7488021" y="3840480"/>
+            <a:ext cx="1198778" cy="411480"/>
           </a:xfrm>
           <a:prstGeom prst="rect">
             <a:avLst/>
@@ -6169,8 +6169,8 @@
         </p:nvSpPr>
         <p:spPr>
           <a:xfrm>
-            <a:off x="7744967" y="3730752"/>
-            <a:ext cx="868680" cy="384048"/>
+            <a:off x="7488021" y="3840480"/>
+            <a:ext cx="1198778" cy="411480"/>
           </a:xfrm>
           <a:prstGeom prst="rect">
             <a:avLst/>
@@ -6183,9 +6183,9 @@
           </a:bodyPr>
           <a:lstStyle/>
           <a:p>
-            <a:pPr algn="l"/>
-            <a:r>
-              <a:rPr sz="1300" b="0" i="0">
+            <a:pPr algn="ctr"/>
+            <a:r>
+              <a:rPr sz="1400" b="0" i="0">
                 <a:solidFill>
                   <a:srgbClr val="2C3945"/>
                 </a:solidFill>
